--- a/docs/usage_deck/final/機台log分析使用說明書.pptx
+++ b/docs/usage_deck/final/機台log分析使用說明書.pptx
@@ -1,6 +1,6 @@
 
 <file path=ppt/presentation.xml><?xml version="1.0" encoding="utf-8"?>
-<p:presentation xmlns:a="http://schemas.openxmlformats.org/drawingml/2006/main" xmlns:r="http://schemas.openxmlformats.org/officeDocument/2006/relationships" xmlns:p="http://schemas.openxmlformats.org/presentationml/2006/main" autoCompressPictures="0">
+<p:presentation xmlns:p15="http://schemas.microsoft.com/office/powerpoint/2012/main" xmlns:a="http://schemas.openxmlformats.org/drawingml/2006/main" xmlns:r="http://schemas.openxmlformats.org/officeDocument/2006/relationships" xmlns:p="http://schemas.openxmlformats.org/presentationml/2006/main" autoCompressPictures="0">
   <p:sldMasterIdLst>
     <p:sldMasterId id="2147483648" r:id="rId4"/>
   </p:sldMasterIdLst>
@@ -492,7 +492,7 @@
 </file>
 
 <file path=ppt/slideLayouts/slideLayout1.xml><?xml version="1.0" encoding="utf-8"?>
-<p:sldLayout xmlns:a="http://schemas.openxmlformats.org/drawingml/2006/main" xmlns:r="http://schemas.openxmlformats.org/officeDocument/2006/relationships" xmlns:p="http://schemas.openxmlformats.org/presentationml/2006/main" showMasterSp="0" preserve="1" userDrawn="1">
+<p:sldLayout xmlns:a16="http://schemas.microsoft.com/office/drawing/2014/main" xmlns:asvg="http://schemas.microsoft.com/office/drawing/2016/SVG/main" xmlns:p14="http://schemas.microsoft.com/office/powerpoint/2010/main" xmlns:a="http://schemas.openxmlformats.org/drawingml/2006/main" xmlns:r="http://schemas.openxmlformats.org/officeDocument/2006/relationships" xmlns:p="http://schemas.openxmlformats.org/presentationml/2006/main" showMasterSp="0" preserve="1" userDrawn="1">
   <p:cSld name="1_cover">
     <p:bg>
       <p:bgPr>
@@ -653,7 +653,7 @@
           <a:blip r:embed="rId3">
             <a:extLst>
               <a:ext uri="{96DAC541-7B7A-43D3-8B79-37D633B846F1}">
-                <asvg:svgBlip xmlns:asvg="http://schemas.microsoft.com/office/drawing/2016/SVG/main" xmlns="" r:embed="rId4"/>
+                <asvg:svgBlip xmlns:asvg="http://schemas.microsoft.com/office/drawing/2016/SVG/main" r:embed="rId4"/>
               </a:ext>
             </a:extLst>
           </a:blip>
@@ -1701,7 +1701,7 @@
 </file>
 
 <file path=ppt/slideLayouts/slideLayout2.xml><?xml version="1.0" encoding="utf-8"?>
-<p:sldLayout xmlns:a="http://schemas.openxmlformats.org/drawingml/2006/main" xmlns:r="http://schemas.openxmlformats.org/officeDocument/2006/relationships" xmlns:p="http://schemas.openxmlformats.org/presentationml/2006/main" showMasterSp="0" preserve="1" userDrawn="1">
+<p:sldLayout xmlns:a16="http://schemas.microsoft.com/office/drawing/2014/main" xmlns:p14="http://schemas.microsoft.com/office/powerpoint/2010/main" xmlns:a="http://schemas.openxmlformats.org/drawingml/2006/main" xmlns:r="http://schemas.openxmlformats.org/officeDocument/2006/relationships" xmlns:p="http://schemas.openxmlformats.org/presentationml/2006/main" showMasterSp="0" preserve="1" userDrawn="1">
   <p:cSld name="1_agenda">
     <p:bg>
       <p:bgPr>
@@ -3165,7 +3165,7 @@
 </file>
 
 <file path=ppt/slideLayouts/slideLayout7.xml><?xml version="1.0" encoding="utf-8"?>
-<p:sldLayout xmlns:a="http://schemas.openxmlformats.org/drawingml/2006/main" xmlns:r="http://schemas.openxmlformats.org/officeDocument/2006/relationships" xmlns:p="http://schemas.openxmlformats.org/presentationml/2006/main" showMasterSp="0" preserve="1" userDrawn="1">
+<p:sldLayout xmlns:a16="http://schemas.microsoft.com/office/drawing/2014/main" xmlns:p14="http://schemas.microsoft.com/office/powerpoint/2010/main" xmlns:a="http://schemas.openxmlformats.org/drawingml/2006/main" xmlns:r="http://schemas.openxmlformats.org/officeDocument/2006/relationships" xmlns:p="http://schemas.openxmlformats.org/presentationml/2006/main" showMasterSp="0" preserve="1" userDrawn="1">
   <p:cSld name="1_content page">
     <p:bg>
       <p:bgPr>
@@ -4514,7 +4514,7 @@
 </file>
 
 <file path=ppt/slideMasters/slideMaster1.xml><?xml version="1.0" encoding="utf-8"?>
-<p:sldMaster xmlns:a="http://schemas.openxmlformats.org/drawingml/2006/main" xmlns:r="http://schemas.openxmlformats.org/officeDocument/2006/relationships" xmlns:p="http://schemas.openxmlformats.org/presentationml/2006/main">
+<p:sldMaster xmlns:a16="http://schemas.microsoft.com/office/drawing/2014/main" xmlns:a="http://schemas.openxmlformats.org/drawingml/2006/main" xmlns:r="http://schemas.openxmlformats.org/officeDocument/2006/relationships" xmlns:p="http://schemas.openxmlformats.org/presentationml/2006/main">
   <p:cSld>
     <p:bg>
       <p:bgPr>
@@ -4969,7 +4969,7 @@
         </p:nvSpPr>
         <p:spPr>
           <a:xfrm>
-            <a:off x="804672" y="2286000"/>
+            <a:off x="1016000" y="2286000"/>
             <a:ext cx="11247120" cy="830997"/>
           </a:xfrm>
           <a:prstGeom prst="rect">
@@ -5039,7 +5039,7 @@
         </p:nvSpPr>
         <p:spPr>
           <a:xfrm>
-            <a:off x="822960" y="3429000"/>
+            <a:off x="1016000" y="3429000"/>
             <a:ext cx="10972800" cy="457200"/>
           </a:xfrm>
           <a:prstGeom prst="rect">
@@ -5079,7 +5079,7 @@
         </p:nvCxnSpPr>
         <p:spPr>
           <a:xfrm>
-            <a:off x="841248" y="4114800"/>
+            <a:off x="1016000" y="4114800"/>
             <a:ext cx="3108960" cy="0"/>
           </a:xfrm>
           <a:prstGeom prst="line">
@@ -5114,7 +5114,7 @@
         </p:nvSpPr>
         <p:spPr>
           <a:xfrm>
-            <a:off x="841248" y="4343400"/>
+            <a:off x="1016000" y="4343400"/>
             <a:ext cx="10972800" cy="365760"/>
           </a:xfrm>
           <a:prstGeom prst="rect">
@@ -5154,7 +5154,7 @@
         </p:nvSpPr>
         <p:spPr>
           <a:xfrm>
-            <a:off x="841248" y="6080760"/>
+            <a:off x="1016000" y="6080760"/>
             <a:ext cx="7315200" cy="274320"/>
           </a:xfrm>
           <a:prstGeom prst="rect">
@@ -5764,7 +5764,7 @@
 </file>
 
 <file path=ppt/slides/slide11.xml><?xml version="1.0" encoding="utf-8"?>
-<p:sld xmlns:a="http://schemas.openxmlformats.org/drawingml/2006/main" xmlns:r="http://schemas.openxmlformats.org/officeDocument/2006/relationships" xmlns:p="http://schemas.openxmlformats.org/presentationml/2006/main">
+<p:sld xmlns:a16="http://schemas.microsoft.com/office/drawing/2014/main" xmlns:a="http://schemas.openxmlformats.org/drawingml/2006/main" xmlns:r="http://schemas.openxmlformats.org/officeDocument/2006/relationships" xmlns:p="http://schemas.openxmlformats.org/presentationml/2006/main">
   <p:cSld>
     <p:spTree>
       <p:nvGrpSpPr>
@@ -7220,6 +7220,10 @@
           <a:lstStyle/>
           <a:p>
             <a:r>
+              <a:rPr>
+                <a:latin typeface="Times New Roman"/>
+                <a:ea typeface="宋体"/>
+              </a:rPr>
               <a:t>目录</a:t>
             </a:r>
           </a:p>
@@ -7247,7 +7251,7 @@
           <a:p>
             <a:pPr>
               <a:lnSpc>
-                <a:spcPct val="140000"/>
+                <a:spcPct val="160000"/>
               </a:lnSpc>
             </a:pPr>
             <a:r>
@@ -7281,7 +7285,7 @@
           <a:p>
             <a:pPr>
               <a:lnSpc>
-                <a:spcPct val="140000"/>
+                <a:spcPct val="160000"/>
               </a:lnSpc>
             </a:pPr>
             <a:r>
@@ -7315,7 +7319,7 @@
           <a:p>
             <a:pPr>
               <a:lnSpc>
-                <a:spcPct val="140000"/>
+                <a:spcPct val="160000"/>
               </a:lnSpc>
             </a:pPr>
             <a:r>
@@ -7369,7 +7373,7 @@
           <a:p>
             <a:pPr>
               <a:lnSpc>
-                <a:spcPct val="140000"/>
+                <a:spcPct val="160000"/>
               </a:lnSpc>
             </a:pPr>
             <a:r>
@@ -10046,7 +10050,7 @@
 </file>
 
 <file path=ppt/slides/slide6.xml><?xml version="1.0" encoding="utf-8"?>
-<p:sld xmlns:a="http://schemas.openxmlformats.org/drawingml/2006/main" xmlns:r="http://schemas.openxmlformats.org/officeDocument/2006/relationships" xmlns:p="http://schemas.openxmlformats.org/presentationml/2006/main">
+<p:sld xmlns:a14="http://schemas.microsoft.com/office/drawing/2010/main" xmlns:a="http://schemas.openxmlformats.org/drawingml/2006/main" xmlns:r="http://schemas.openxmlformats.org/officeDocument/2006/relationships" xmlns:p="http://schemas.openxmlformats.org/presentationml/2006/main">
   <p:cSld>
     <p:spTree>
       <p:nvGrpSpPr>
@@ -10370,9 +10374,9 @@
           <a:lstStyle/>
           <a:p>
             <a:r>
-              <a:rPr lang="zh-TW" altLang="en-US" dirty="0">
-                <a:solidFill>
-                  <a:srgbClr val="FF0000"/>
+              <a:rPr lang="zh-TW" altLang="en-US" sz="1400" dirty="0">
+                <a:solidFill>
+                  <a:srgbClr val="083C63"/>
                 </a:solidFill>
               </a:rPr>
               <a:t>①</a:t>
@@ -10403,9 +10407,9 @@
           <a:lstStyle/>
           <a:p>
             <a:r>
-              <a:rPr lang="zh-TW" altLang="en-US" dirty="0">
-                <a:solidFill>
-                  <a:srgbClr val="FF0000"/>
+              <a:rPr lang="zh-TW" altLang="en-US" sz="1400" dirty="0">
+                <a:solidFill>
+                  <a:srgbClr val="083C63"/>
                 </a:solidFill>
               </a:rPr>
               <a:t>②</a:t>
@@ -10436,9 +10440,9 @@
           <a:lstStyle/>
           <a:p>
             <a:r>
-              <a:rPr lang="zh-TW" altLang="en-US" dirty="0">
-                <a:solidFill>
-                  <a:srgbClr val="FF0000"/>
+              <a:rPr lang="zh-TW" altLang="en-US" sz="1400" dirty="0">
+                <a:solidFill>
+                  <a:srgbClr val="083C63"/>
                 </a:solidFill>
               </a:rPr>
               <a:t>③</a:t>
@@ -10469,9 +10473,9 @@
           <a:lstStyle/>
           <a:p>
             <a:r>
-              <a:rPr lang="zh-TW" altLang="en-US" dirty="0">
-                <a:solidFill>
-                  <a:srgbClr val="FF0000"/>
+              <a:rPr lang="zh-TW" altLang="en-US" sz="1400" dirty="0">
+                <a:solidFill>
+                  <a:srgbClr val="083C63"/>
                 </a:solidFill>
               </a:rPr>
               <a:t>④</a:t>
@@ -10502,9 +10506,9 @@
           <a:lstStyle/>
           <a:p>
             <a:r>
-              <a:rPr lang="zh-TW" altLang="en-US" dirty="0">
-                <a:solidFill>
-                  <a:srgbClr val="FF0000"/>
+              <a:rPr lang="zh-TW" altLang="en-US" sz="1400" dirty="0">
+                <a:solidFill>
+                  <a:srgbClr val="083C63"/>
                 </a:solidFill>
               </a:rPr>
               <a:t>⑤</a:t>
@@ -10528,7 +10532,7 @@
 </file>
 
 <file path=ppt/slides/slide7.xml><?xml version="1.0" encoding="utf-8"?>
-<p:sld xmlns:a="http://schemas.openxmlformats.org/drawingml/2006/main" xmlns:r="http://schemas.openxmlformats.org/officeDocument/2006/relationships" xmlns:p="http://schemas.openxmlformats.org/presentationml/2006/main">
+<p:sld xmlns:a16="http://schemas.microsoft.com/office/drawing/2014/main" xmlns:a="http://schemas.openxmlformats.org/drawingml/2006/main" xmlns:r="http://schemas.openxmlformats.org/officeDocument/2006/relationships" xmlns:p="http://schemas.openxmlformats.org/presentationml/2006/main">
   <p:cSld>
     <p:spTree>
       <p:nvGrpSpPr>
@@ -11514,7 +11518,7 @@
         </p:nvSpPr>
         <p:spPr>
           <a:xfrm>
-            <a:off x="640080" y="1417320"/>
+            <a:off x="640080" y="1333500"/>
             <a:ext cx="6309360" cy="457200"/>
           </a:xfrm>
           <a:prstGeom prst="rect">
@@ -11554,7 +11558,7 @@
         </p:nvSpPr>
         <p:spPr>
           <a:xfrm>
-            <a:off x="640080" y="1837944"/>
+            <a:off x="640080" y="1714500"/>
             <a:ext cx="6309360" cy="502920"/>
           </a:xfrm>
           <a:prstGeom prst="rect">
@@ -11594,7 +11598,7 @@
         </p:nvCxnSpPr>
         <p:spPr>
           <a:xfrm>
-            <a:off x="640080" y="2331720"/>
+            <a:off x="640080" y="2184400"/>
             <a:ext cx="6309360" cy="0"/>
           </a:xfrm>
           <a:prstGeom prst="line">
@@ -11629,7 +11633,7 @@
         </p:nvSpPr>
         <p:spPr>
           <a:xfrm>
-            <a:off x="640080" y="2404872"/>
+            <a:off x="640080" y="2311400"/>
             <a:ext cx="6309360" cy="457200"/>
           </a:xfrm>
           <a:prstGeom prst="rect">
@@ -11669,7 +11673,7 @@
         </p:nvSpPr>
         <p:spPr>
           <a:xfrm>
-            <a:off x="640080" y="2825496"/>
+            <a:off x="640080" y="2692400"/>
             <a:ext cx="6309360" cy="502920"/>
           </a:xfrm>
           <a:prstGeom prst="rect">
@@ -11709,7 +11713,7 @@
         </p:nvCxnSpPr>
         <p:spPr>
           <a:xfrm>
-            <a:off x="640080" y="3319272"/>
+            <a:off x="640080" y="3162300"/>
             <a:ext cx="6309360" cy="0"/>
           </a:xfrm>
           <a:prstGeom prst="line">
@@ -11744,7 +11748,7 @@
         </p:nvSpPr>
         <p:spPr>
           <a:xfrm>
-            <a:off x="640080" y="3392424"/>
+            <a:off x="640080" y="3289300"/>
             <a:ext cx="6309360" cy="457200"/>
           </a:xfrm>
           <a:prstGeom prst="rect">
@@ -11784,7 +11788,7 @@
         </p:nvSpPr>
         <p:spPr>
           <a:xfrm>
-            <a:off x="640080" y="3813048"/>
+            <a:off x="640080" y="3670300"/>
             <a:ext cx="6309360" cy="502920"/>
           </a:xfrm>
           <a:prstGeom prst="rect">
@@ -11824,7 +11828,7 @@
         </p:nvCxnSpPr>
         <p:spPr>
           <a:xfrm>
-            <a:off x="640080" y="4306824"/>
+            <a:off x="640080" y="4140200"/>
             <a:ext cx="6309360" cy="0"/>
           </a:xfrm>
           <a:prstGeom prst="line">
@@ -11859,7 +11863,7 @@
         </p:nvSpPr>
         <p:spPr>
           <a:xfrm>
-            <a:off x="640080" y="4379976"/>
+            <a:off x="640080" y="4279900"/>
             <a:ext cx="6309360" cy="457200"/>
           </a:xfrm>
           <a:prstGeom prst="rect">
@@ -11899,7 +11903,7 @@
         </p:nvSpPr>
         <p:spPr>
           <a:xfrm>
-            <a:off x="640080" y="4800600"/>
+            <a:off x="640080" y="4660900"/>
             <a:ext cx="6309360" cy="502920"/>
           </a:xfrm>
           <a:prstGeom prst="rect">
@@ -11939,7 +11943,7 @@
         </p:nvCxnSpPr>
         <p:spPr>
           <a:xfrm>
-            <a:off x="640080" y="5294376"/>
+            <a:off x="640080" y="5130800"/>
             <a:ext cx="6309360" cy="0"/>
           </a:xfrm>
           <a:prstGeom prst="line">
@@ -11974,7 +11978,7 @@
         </p:nvSpPr>
         <p:spPr>
           <a:xfrm>
-            <a:off x="640080" y="5367528"/>
+            <a:off x="640080" y="5270500"/>
             <a:ext cx="6309360" cy="457200"/>
           </a:xfrm>
           <a:prstGeom prst="rect">
@@ -12014,7 +12018,7 @@
         </p:nvSpPr>
         <p:spPr>
           <a:xfrm>
-            <a:off x="640080" y="5788152"/>
+            <a:off x="640080" y="5651500"/>
             <a:ext cx="6309360" cy="502920"/>
           </a:xfrm>
           <a:prstGeom prst="rect">
@@ -12054,7 +12058,7 @@
         </p:nvCxnSpPr>
         <p:spPr>
           <a:xfrm>
-            <a:off x="640080" y="6281928"/>
+            <a:off x="640080" y="6121400"/>
             <a:ext cx="6309360" cy="0"/>
           </a:xfrm>
           <a:prstGeom prst="line">
@@ -12089,8 +12093,8 @@
         </p:nvSpPr>
         <p:spPr>
           <a:xfrm>
-            <a:off x="640080" y="6373368"/>
-            <a:ext cx="6309360" cy="822960"/>
+            <a:off x="640080" y="6223000"/>
+            <a:ext cx="6309360" cy="635000"/>
           </a:xfrm>
           <a:prstGeom prst="rect">
             <a:avLst/>
@@ -12109,7 +12113,7 @@
               </a:lnSpc>
             </a:pPr>
             <a:r>
-              <a:rPr sz="1400" b="0">
+              <a:rPr sz="1200" b="0">
                 <a:solidFill>
                   <a:srgbClr val="595959"/>
                 </a:solidFill>
@@ -12742,7 +12746,7 @@
 </file>
 
 <file path=ppt/theme/theme1.xml><?xml version="1.0" encoding="utf-8"?>
-<a:theme xmlns:a="http://schemas.openxmlformats.org/drawingml/2006/main" name="2_Office 佈景主題">
+<a:theme xmlns:thm15="http://schemas.microsoft.com/office/thememl/2012/main" xmlns:a="http://schemas.openxmlformats.org/drawingml/2006/main" name="2_Office 佈景主題">
   <a:themeElements>
     <a:clrScheme name="Foxconn2023">
       <a:dk1>
